--- a/Week07/ResponsiveDesign.pptx
+++ b/Week07/ResponsiveDesign.pptx
@@ -6201,7 +6201,7 @@
           <a:p>
             <a:fld id="{5958763E-B898-436D-883D-03711491D54A}" type="datetimeFigureOut">
               <a:rPr lang="en-US" smtClean="0"/>
-              <a:t>11/5/2024</a:t>
+              <a:t>8/27/2026</a:t>
             </a:fld>
             <a:endParaRPr lang="en-US"/>
           </a:p>
@@ -13717,7 +13717,7 @@
             <a:r>
               <a:rPr lang="en-US" sz="3200" b="1" dirty="0">
                 <a:solidFill>
-                  <a:schemeClr val="bg2"/>
+                  <a:srgbClr val="000000"/>
                 </a:solidFill>
                 <a:hlinkClick r:id="rId3">
                   <a:extLst>
@@ -13727,7 +13727,7 @@
                   </a:extLst>
                 </a:hlinkClick>
               </a:rPr>
-              <a:t>bit.ly/</a:t>
+              <a:t>short.hyland.com/</a:t>
             </a:r>
             <a:r>
               <a:rPr lang="en-US" sz="3200" b="1" dirty="0" err="1">
@@ -13742,7 +13742,7 @@
                   </a:extLst>
                 </a:hlinkClick>
               </a:rPr>
-              <a:t>responsiveoregon</a:t>
+              <a:t>respo</a:t>
             </a:r>
             <a:endParaRPr lang="en-US" sz="3200" b="1" dirty="0">
               <a:solidFill>
